--- a/HW01_plots.pptx
+++ b/HW01_plots.pptx
@@ -105,6 +105,11 @@
       </a:defRPr>
     </a:lvl9pPr>
   </p:defaultTextStyle>
+  <p:extLst>
+    <p:ext uri="{EFAFB233-063F-42B5-8137-9DF3F51BA10A}">
+      <p15:sldGuideLst xmlns:p15="http://schemas.microsoft.com/office/powerpoint/2012/main"/>
+    </p:ext>
+  </p:extLst>
 </p:presentation>
 </file>
 
@@ -239,7 +244,7 @@
           <a:p>
             <a:fld id="{65E86E53-56BA-814A-8403-E75ED1E6FA5E}" type="datetimeFigureOut">
               <a:rPr lang="en-US" smtClean="0"/>
-              <a:t>2/4/26</a:t>
+              <a:t>2/6/26</a:t>
             </a:fld>
             <a:endParaRPr lang="en-US"/>
           </a:p>
@@ -409,7 +414,7 @@
           <a:p>
             <a:fld id="{65E86E53-56BA-814A-8403-E75ED1E6FA5E}" type="datetimeFigureOut">
               <a:rPr lang="en-US" smtClean="0"/>
-              <a:t>2/4/26</a:t>
+              <a:t>2/6/26</a:t>
             </a:fld>
             <a:endParaRPr lang="en-US"/>
           </a:p>
@@ -589,7 +594,7 @@
           <a:p>
             <a:fld id="{65E86E53-56BA-814A-8403-E75ED1E6FA5E}" type="datetimeFigureOut">
               <a:rPr lang="en-US" smtClean="0"/>
-              <a:t>2/4/26</a:t>
+              <a:t>2/6/26</a:t>
             </a:fld>
             <a:endParaRPr lang="en-US"/>
           </a:p>
@@ -759,7 +764,7 @@
           <a:p>
             <a:fld id="{65E86E53-56BA-814A-8403-E75ED1E6FA5E}" type="datetimeFigureOut">
               <a:rPr lang="en-US" smtClean="0"/>
-              <a:t>2/4/26</a:t>
+              <a:t>2/6/26</a:t>
             </a:fld>
             <a:endParaRPr lang="en-US"/>
           </a:p>
@@ -1005,7 +1010,7 @@
           <a:p>
             <a:fld id="{65E86E53-56BA-814A-8403-E75ED1E6FA5E}" type="datetimeFigureOut">
               <a:rPr lang="en-US" smtClean="0"/>
-              <a:t>2/4/26</a:t>
+              <a:t>2/6/26</a:t>
             </a:fld>
             <a:endParaRPr lang="en-US"/>
           </a:p>
@@ -1237,7 +1242,7 @@
           <a:p>
             <a:fld id="{65E86E53-56BA-814A-8403-E75ED1E6FA5E}" type="datetimeFigureOut">
               <a:rPr lang="en-US" smtClean="0"/>
-              <a:t>2/4/26</a:t>
+              <a:t>2/6/26</a:t>
             </a:fld>
             <a:endParaRPr lang="en-US"/>
           </a:p>
@@ -1604,7 +1609,7 @@
           <a:p>
             <a:fld id="{65E86E53-56BA-814A-8403-E75ED1E6FA5E}" type="datetimeFigureOut">
               <a:rPr lang="en-US" smtClean="0"/>
-              <a:t>2/4/26</a:t>
+              <a:t>2/6/26</a:t>
             </a:fld>
             <a:endParaRPr lang="en-US"/>
           </a:p>
@@ -1722,7 +1727,7 @@
           <a:p>
             <a:fld id="{65E86E53-56BA-814A-8403-E75ED1E6FA5E}" type="datetimeFigureOut">
               <a:rPr lang="en-US" smtClean="0"/>
-              <a:t>2/4/26</a:t>
+              <a:t>2/6/26</a:t>
             </a:fld>
             <a:endParaRPr lang="en-US"/>
           </a:p>
@@ -1817,7 +1822,7 @@
           <a:p>
             <a:fld id="{65E86E53-56BA-814A-8403-E75ED1E6FA5E}" type="datetimeFigureOut">
               <a:rPr lang="en-US" smtClean="0"/>
-              <a:t>2/4/26</a:t>
+              <a:t>2/6/26</a:t>
             </a:fld>
             <a:endParaRPr lang="en-US"/>
           </a:p>
@@ -2094,7 +2099,7 @@
           <a:p>
             <a:fld id="{65E86E53-56BA-814A-8403-E75ED1E6FA5E}" type="datetimeFigureOut">
               <a:rPr lang="en-US" smtClean="0"/>
-              <a:t>2/4/26</a:t>
+              <a:t>2/6/26</a:t>
             </a:fld>
             <a:endParaRPr lang="en-US"/>
           </a:p>
@@ -2351,7 +2356,7 @@
           <a:p>
             <a:fld id="{65E86E53-56BA-814A-8403-E75ED1E6FA5E}" type="datetimeFigureOut">
               <a:rPr lang="en-US" smtClean="0"/>
-              <a:t>2/4/26</a:t>
+              <a:t>2/6/26</a:t>
             </a:fld>
             <a:endParaRPr lang="en-US"/>
           </a:p>
@@ -2564,7 +2569,7 @@
           <a:p>
             <a:fld id="{65E86E53-56BA-814A-8403-E75ED1E6FA5E}" type="datetimeFigureOut">
               <a:rPr lang="en-US" smtClean="0"/>
-              <a:t>2/4/26</a:t>
+              <a:t>2/6/26</a:t>
             </a:fld>
             <a:endParaRPr lang="en-US"/>
           </a:p>
@@ -2971,10 +2976,10 @@
       </p:grpSpPr>
       <p:pic>
         <p:nvPicPr>
-          <p:cNvPr id="7" name="Picture 6" descr="A graph of a graph&#10;&#10;AI-generated content may be incorrect.">
+          <p:cNvPr id="3" name="Picture 2" descr="A graph of a graph&#10;&#10;AI-generated content may be incorrect.">
             <a:extLst>
               <a:ext uri="{FF2B5EF4-FFF2-40B4-BE49-F238E27FC236}">
-                <a16:creationId xmlns:a16="http://schemas.microsoft.com/office/drawing/2014/main" id="{B69066AB-BE03-8799-86BA-F35B045B6422}"/>
+                <a16:creationId xmlns:a16="http://schemas.microsoft.com/office/drawing/2014/main" id="{FCBC2325-D0E7-003D-DD09-D08F7B730B22}"/>
               </a:ext>
             </a:extLst>
           </p:cNvPr>
@@ -2991,8 +2996,8 @@
         </p:blipFill>
         <p:spPr>
           <a:xfrm>
-            <a:off x="233921" y="2386552"/>
-            <a:ext cx="2892056" cy="2169042"/>
+            <a:off x="233912" y="2386549"/>
+            <a:ext cx="2892061" cy="2169046"/>
           </a:xfrm>
           <a:prstGeom prst="rect">
             <a:avLst/>
@@ -3001,10 +3006,10 @@
       </p:pic>
       <p:pic>
         <p:nvPicPr>
-          <p:cNvPr id="9" name="Picture 8" descr="A graph of a graph&#10;&#10;AI-generated content may be incorrect.">
+          <p:cNvPr id="5" name="Picture 4" descr="A graph of a graph&#10;&#10;AI-generated content may be incorrect.">
             <a:extLst>
               <a:ext uri="{FF2B5EF4-FFF2-40B4-BE49-F238E27FC236}">
-                <a16:creationId xmlns:a16="http://schemas.microsoft.com/office/drawing/2014/main" id="{7E4750D2-E170-A63F-E373-030BEE4AFDBA}"/>
+                <a16:creationId xmlns:a16="http://schemas.microsoft.com/office/drawing/2014/main" id="{54BA8914-0B24-A89B-3B5C-74F8007DE193}"/>
               </a:ext>
             </a:extLst>
           </p:cNvPr>
@@ -3021,8 +3026,8 @@
         </p:blipFill>
         <p:spPr>
           <a:xfrm>
-            <a:off x="3125977" y="2386551"/>
-            <a:ext cx="2892057" cy="2169043"/>
+            <a:off x="3125968" y="2386549"/>
+            <a:ext cx="2892061" cy="2169046"/>
           </a:xfrm>
           <a:prstGeom prst="rect">
             <a:avLst/>
@@ -3031,10 +3036,10 @@
       </p:pic>
       <p:pic>
         <p:nvPicPr>
-          <p:cNvPr id="11" name="Picture 10" descr="A graph of a number of blue lines&#10;&#10;AI-generated content may be incorrect.">
+          <p:cNvPr id="8" name="Picture 7" descr="A graph of a number of blue lines&#10;&#10;AI-generated content may be incorrect.">
             <a:extLst>
               <a:ext uri="{FF2B5EF4-FFF2-40B4-BE49-F238E27FC236}">
-                <a16:creationId xmlns:a16="http://schemas.microsoft.com/office/drawing/2014/main" id="{4993A880-962D-3FAF-6DAE-C606E42E79B9}"/>
+                <a16:creationId xmlns:a16="http://schemas.microsoft.com/office/drawing/2014/main" id="{AAF9EC10-76BA-8B27-A3EF-C606FCA34983}"/>
               </a:ext>
             </a:extLst>
           </p:cNvPr>
@@ -3051,8 +3056,8 @@
         </p:blipFill>
         <p:spPr>
           <a:xfrm>
-            <a:off x="6018033" y="2386550"/>
-            <a:ext cx="2892058" cy="2169044"/>
+            <a:off x="6018029" y="2386549"/>
+            <a:ext cx="2892061" cy="2169046"/>
           </a:xfrm>
           <a:prstGeom prst="rect">
             <a:avLst/>
@@ -3061,10 +3066,10 @@
       </p:pic>
       <p:pic>
         <p:nvPicPr>
-          <p:cNvPr id="13" name="Picture 12" descr="A graph of a graph&#10;&#10;AI-generated content may be incorrect.">
+          <p:cNvPr id="12" name="Picture 11" descr="A graph of a graph&#10;&#10;AI-generated content may be incorrect.">
             <a:extLst>
               <a:ext uri="{FF2B5EF4-FFF2-40B4-BE49-F238E27FC236}">
-                <a16:creationId xmlns:a16="http://schemas.microsoft.com/office/drawing/2014/main" id="{F1C56C7F-5CB9-87B1-A6D1-D4948E00415C}"/>
+                <a16:creationId xmlns:a16="http://schemas.microsoft.com/office/drawing/2014/main" id="{F98D23CF-1DB7-5213-B697-60B720BA9F4F}"/>
               </a:ext>
             </a:extLst>
           </p:cNvPr>
@@ -3081,8 +3086,8 @@
         </p:blipFill>
         <p:spPr>
           <a:xfrm>
-            <a:off x="233923" y="217503"/>
-            <a:ext cx="2892058" cy="2169044"/>
+            <a:off x="233911" y="217502"/>
+            <a:ext cx="2892062" cy="2169047"/>
           </a:xfrm>
           <a:prstGeom prst="rect">
             <a:avLst/>
@@ -3091,10 +3096,10 @@
       </p:pic>
       <p:pic>
         <p:nvPicPr>
-          <p:cNvPr id="15" name="Picture 14" descr="A graph of a graph&#10;&#10;AI-generated content may be incorrect.">
+          <p:cNvPr id="16" name="Picture 15" descr="A graph of a graph&#10;&#10;AI-generated content may be incorrect.">
             <a:extLst>
               <a:ext uri="{FF2B5EF4-FFF2-40B4-BE49-F238E27FC236}">
-                <a16:creationId xmlns:a16="http://schemas.microsoft.com/office/drawing/2014/main" id="{CA5EE5C9-4D83-3ABA-E110-26C706CABA60}"/>
+                <a16:creationId xmlns:a16="http://schemas.microsoft.com/office/drawing/2014/main" id="{1C21A8C9-3937-736F-0712-C40F6A72CA7B}"/>
               </a:ext>
             </a:extLst>
           </p:cNvPr>
@@ -3111,8 +3116,8 @@
         </p:blipFill>
         <p:spPr>
           <a:xfrm>
-            <a:off x="3125977" y="217500"/>
-            <a:ext cx="2892060" cy="2169045"/>
+            <a:off x="3125968" y="217501"/>
+            <a:ext cx="2892063" cy="2169047"/>
           </a:xfrm>
           <a:prstGeom prst="rect">
             <a:avLst/>
@@ -3121,40 +3126,10 @@
       </p:pic>
       <p:pic>
         <p:nvPicPr>
-          <p:cNvPr id="17" name="Picture 16" descr="A graph of a graph&#10;&#10;AI-generated content may be incorrect.">
+          <p:cNvPr id="20" name="Picture 19" descr="A graph of a number of lines&#10;&#10;AI-generated content may be incorrect.">
             <a:extLst>
               <a:ext uri="{FF2B5EF4-FFF2-40B4-BE49-F238E27FC236}">
-                <a16:creationId xmlns:a16="http://schemas.microsoft.com/office/drawing/2014/main" id="{577D9EC6-0DDF-06E4-EE5D-EB19AB820A25}"/>
-              </a:ext>
-            </a:extLst>
-          </p:cNvPr>
-          <p:cNvPicPr>
-            <a:picLocks noChangeAspect="1"/>
-          </p:cNvPicPr>
-          <p:nvPr/>
-        </p:nvPicPr>
-        <p:blipFill>
-          <a:blip r:embed="rId6"/>
-          <a:stretch>
-            <a:fillRect/>
-          </a:stretch>
-        </p:blipFill>
-        <p:spPr>
-          <a:xfrm>
-            <a:off x="6018031" y="217499"/>
-            <a:ext cx="2892060" cy="2169045"/>
-          </a:xfrm>
-          <a:prstGeom prst="rect">
-            <a:avLst/>
-          </a:prstGeom>
-        </p:spPr>
-      </p:pic>
-      <p:pic>
-        <p:nvPicPr>
-          <p:cNvPr id="19" name="Picture 18" descr="A graph with lines and numbers&#10;&#10;AI-generated content may be incorrect.">
-            <a:extLst>
-              <a:ext uri="{FF2B5EF4-FFF2-40B4-BE49-F238E27FC236}">
-                <a16:creationId xmlns:a16="http://schemas.microsoft.com/office/drawing/2014/main" id="{3E4D0095-5A39-14FC-FA4E-68D8B3A94CC3}"/>
+                <a16:creationId xmlns:a16="http://schemas.microsoft.com/office/drawing/2014/main" id="{D098738C-97E0-AF2A-121F-2E59443ECAB3}"/>
               </a:ext>
             </a:extLst>
           </p:cNvPr>
@@ -3171,8 +3146,38 @@
         </p:blipFill>
         <p:spPr>
           <a:xfrm>
-            <a:off x="233913" y="4555597"/>
-            <a:ext cx="2892060" cy="2169045"/>
+            <a:off x="6018028" y="217501"/>
+            <a:ext cx="2892062" cy="2169047"/>
+          </a:xfrm>
+          <a:prstGeom prst="rect">
+            <a:avLst/>
+          </a:prstGeom>
+        </p:spPr>
+      </p:pic>
+      <p:pic>
+        <p:nvPicPr>
+          <p:cNvPr id="22" name="Picture 21" descr="A graph with lines and numbers&#10;&#10;AI-generated content may be incorrect.">
+            <a:extLst>
+              <a:ext uri="{FF2B5EF4-FFF2-40B4-BE49-F238E27FC236}">
+                <a16:creationId xmlns:a16="http://schemas.microsoft.com/office/drawing/2014/main" id="{FB92AC48-6250-9670-B762-3579D3CB6923}"/>
+              </a:ext>
+            </a:extLst>
+          </p:cNvPr>
+          <p:cNvPicPr>
+            <a:picLocks noChangeAspect="1"/>
+          </p:cNvPicPr>
+          <p:nvPr/>
+        </p:nvPicPr>
+        <p:blipFill>
+          <a:blip r:embed="rId8"/>
+          <a:stretch>
+            <a:fillRect/>
+          </a:stretch>
+        </p:blipFill>
+        <p:spPr>
+          <a:xfrm>
+            <a:off x="233905" y="4555596"/>
+            <a:ext cx="2892061" cy="2169046"/>
           </a:xfrm>
           <a:prstGeom prst="rect">
             <a:avLst/>
@@ -3211,10 +3216,10 @@
       </p:grpSpPr>
       <p:pic>
         <p:nvPicPr>
-          <p:cNvPr id="6" name="Picture 5" descr="A graph of a graph&#10;&#10;AI-generated content may be incorrect.">
+          <p:cNvPr id="3" name="Picture 2" descr="A graph of a graph&#10;&#10;AI-generated content may be incorrect.">
             <a:extLst>
               <a:ext uri="{FF2B5EF4-FFF2-40B4-BE49-F238E27FC236}">
-                <a16:creationId xmlns:a16="http://schemas.microsoft.com/office/drawing/2014/main" id="{D9F8A98A-1174-8FC6-8C46-17422A84AAF1}"/>
+                <a16:creationId xmlns:a16="http://schemas.microsoft.com/office/drawing/2014/main" id="{17C47F7D-8641-F49F-8D7F-FA13CEC93ECD}"/>
               </a:ext>
             </a:extLst>
           </p:cNvPr>
@@ -3231,7 +3236,7 @@
         </p:blipFill>
         <p:spPr>
           <a:xfrm>
-            <a:off x="244553" y="202013"/>
+            <a:off x="244552" y="2371049"/>
             <a:ext cx="2892057" cy="2169043"/>
           </a:xfrm>
           <a:prstGeom prst="rect">
@@ -3241,10 +3246,10 @@
       </p:pic>
       <p:pic>
         <p:nvPicPr>
-          <p:cNvPr id="8" name="Picture 7" descr="A graph of a graph&#10;&#10;AI-generated content may be incorrect.">
+          <p:cNvPr id="5" name="Picture 4" descr="A graph of a graph&#10;&#10;AI-generated content may be incorrect.">
             <a:extLst>
               <a:ext uri="{FF2B5EF4-FFF2-40B4-BE49-F238E27FC236}">
-                <a16:creationId xmlns:a16="http://schemas.microsoft.com/office/drawing/2014/main" id="{A8AF1124-E6EB-CDBC-A72E-67E4A7EE357B}"/>
+                <a16:creationId xmlns:a16="http://schemas.microsoft.com/office/drawing/2014/main" id="{F990D974-E957-230E-C540-A24F18412CCA}"/>
               </a:ext>
             </a:extLst>
           </p:cNvPr>
@@ -3261,8 +3266,8 @@
         </p:blipFill>
         <p:spPr>
           <a:xfrm>
-            <a:off x="3136610" y="202012"/>
-            <a:ext cx="2892057" cy="2169043"/>
+            <a:off x="3136609" y="2371049"/>
+            <a:ext cx="2892059" cy="2169044"/>
           </a:xfrm>
           <a:prstGeom prst="rect">
             <a:avLst/>
@@ -3271,10 +3276,10 @@
       </p:pic>
       <p:pic>
         <p:nvPicPr>
-          <p:cNvPr id="10" name="Picture 9" descr="A graph of a graph&#10;&#10;AI-generated content may be incorrect.">
+          <p:cNvPr id="9" name="Picture 8" descr="A graph of a graph&#10;&#10;AI-generated content may be incorrect.">
             <a:extLst>
               <a:ext uri="{FF2B5EF4-FFF2-40B4-BE49-F238E27FC236}">
-                <a16:creationId xmlns:a16="http://schemas.microsoft.com/office/drawing/2014/main" id="{A084D740-117E-C2D7-D2CC-5F798EAFD7FA}"/>
+                <a16:creationId xmlns:a16="http://schemas.microsoft.com/office/drawing/2014/main" id="{850D12AA-E92A-2AA0-8EA6-51F02A2E56AB}"/>
               </a:ext>
             </a:extLst>
           </p:cNvPr>
@@ -3291,8 +3296,8 @@
         </p:blipFill>
         <p:spPr>
           <a:xfrm>
-            <a:off x="6028667" y="202011"/>
-            <a:ext cx="2892057" cy="2169043"/>
+            <a:off x="6028666" y="2371049"/>
+            <a:ext cx="2892059" cy="2169044"/>
           </a:xfrm>
           <a:prstGeom prst="rect">
             <a:avLst/>
@@ -3301,10 +3306,10 @@
       </p:pic>
       <p:pic>
         <p:nvPicPr>
-          <p:cNvPr id="12" name="Picture 11" descr="A graph of a graph&#10;&#10;AI-generated content may be incorrect.">
+          <p:cNvPr id="13" name="Picture 12" descr="A graph of a graph&#10;&#10;AI-generated content may be incorrect.">
             <a:extLst>
               <a:ext uri="{FF2B5EF4-FFF2-40B4-BE49-F238E27FC236}">
-                <a16:creationId xmlns:a16="http://schemas.microsoft.com/office/drawing/2014/main" id="{BA766E70-94E8-5803-0F62-64970409AE91}"/>
+                <a16:creationId xmlns:a16="http://schemas.microsoft.com/office/drawing/2014/main" id="{5584D5B6-4330-23B3-A061-A23005C4613E}"/>
               </a:ext>
             </a:extLst>
           </p:cNvPr>
@@ -3321,8 +3326,8 @@
         </p:blipFill>
         <p:spPr>
           <a:xfrm>
-            <a:off x="244553" y="2371052"/>
-            <a:ext cx="2892057" cy="2169043"/>
+            <a:off x="244551" y="202003"/>
+            <a:ext cx="2892060" cy="2169045"/>
           </a:xfrm>
           <a:prstGeom prst="rect">
             <a:avLst/>
@@ -3331,10 +3336,10 @@
       </p:pic>
       <p:pic>
         <p:nvPicPr>
-          <p:cNvPr id="14" name="Picture 13" descr="A graph of a graph&#10;&#10;AI-generated content may be incorrect.">
+          <p:cNvPr id="17" name="Picture 16" descr="A graph of a graph&#10;&#10;AI-generated content may be incorrect.">
             <a:extLst>
               <a:ext uri="{FF2B5EF4-FFF2-40B4-BE49-F238E27FC236}">
-                <a16:creationId xmlns:a16="http://schemas.microsoft.com/office/drawing/2014/main" id="{7AAE9EEE-E6E2-5023-8C13-57C701B50B59}"/>
+                <a16:creationId xmlns:a16="http://schemas.microsoft.com/office/drawing/2014/main" id="{BCD9B37E-3BEB-BFAF-B43E-C59990270093}"/>
               </a:ext>
             </a:extLst>
           </p:cNvPr>
@@ -3351,8 +3356,8 @@
         </p:blipFill>
         <p:spPr>
           <a:xfrm>
-            <a:off x="3136610" y="2371050"/>
-            <a:ext cx="2892057" cy="2169043"/>
+            <a:off x="3136608" y="202002"/>
+            <a:ext cx="2892059" cy="2169044"/>
           </a:xfrm>
           <a:prstGeom prst="rect">
             <a:avLst/>
@@ -3361,10 +3366,10 @@
       </p:pic>
       <p:pic>
         <p:nvPicPr>
-          <p:cNvPr id="16" name="Picture 15" descr="A graph of a graph&#10;&#10;AI-generated content may be incorrect.">
+          <p:cNvPr id="20" name="Picture 19" descr="A graph of a graph&#10;&#10;AI-generated content may be incorrect.">
             <a:extLst>
               <a:ext uri="{FF2B5EF4-FFF2-40B4-BE49-F238E27FC236}">
-                <a16:creationId xmlns:a16="http://schemas.microsoft.com/office/drawing/2014/main" id="{E5C676BD-42D9-800C-0E0D-0910863B6A91}"/>
+                <a16:creationId xmlns:a16="http://schemas.microsoft.com/office/drawing/2014/main" id="{6BEEBC12-A9E6-3706-A13E-FBC345BC0BAC}"/>
               </a:ext>
             </a:extLst>
           </p:cNvPr>
@@ -3381,8 +3386,8 @@
         </p:blipFill>
         <p:spPr>
           <a:xfrm>
-            <a:off x="6028666" y="2371049"/>
-            <a:ext cx="2892057" cy="2169043"/>
+            <a:off x="6028665" y="202001"/>
+            <a:ext cx="2892060" cy="2169045"/>
           </a:xfrm>
           <a:prstGeom prst="rect">
             <a:avLst/>
@@ -3391,10 +3396,10 @@
       </p:pic>
       <p:pic>
         <p:nvPicPr>
-          <p:cNvPr id="18" name="Picture 17" descr="A graph with numbers and lines&#10;&#10;AI-generated content may be incorrect.">
+          <p:cNvPr id="22" name="Picture 21" descr="A graph with numbers and lines&#10;&#10;AI-generated content may be incorrect.">
             <a:extLst>
               <a:ext uri="{FF2B5EF4-FFF2-40B4-BE49-F238E27FC236}">
-                <a16:creationId xmlns:a16="http://schemas.microsoft.com/office/drawing/2014/main" id="{1ED6C291-2AF8-89FB-8F38-74491A0EB298}"/>
+                <a16:creationId xmlns:a16="http://schemas.microsoft.com/office/drawing/2014/main" id="{8A64CF3E-E13B-270D-4C7E-EDC4D7F85E89}"/>
               </a:ext>
             </a:extLst>
           </p:cNvPr>
@@ -3411,8 +3416,8 @@
         </p:blipFill>
         <p:spPr>
           <a:xfrm>
-            <a:off x="244552" y="4540087"/>
-            <a:ext cx="2892057" cy="2169043"/>
+            <a:off x="244551" y="4540092"/>
+            <a:ext cx="2892059" cy="2169044"/>
           </a:xfrm>
           <a:prstGeom prst="rect">
             <a:avLst/>
